--- a/03-Slides/ETHAGT07/ETHAGT07-slides.pptx
+++ b/03-Slides/ETHAGT07/ETHAGT07-slides.pptx
@@ -12873,6 +12873,42 @@
         </p:nvSpPr>
         <p:spPr>
           <a:xfrm>
+            <a:off x="274320" y="6035040"/>
+            <a:ext cx="11612880" cy="320040"/>
+          </a:xfrm>
+          <a:prstGeom prst="rect">
+            <a:avLst/>
+          </a:prstGeom>
+          <a:noFill/>
+        </p:spPr>
+        <p:txBody>
+          <a:bodyPr wrap="square">
+            <a:spAutoFit/>
+          </a:bodyPr>
+          <a:lstStyle/>
+          <a:p>
+            <a:pPr algn="l">
+              <a:defRPr sz="900" b="0">
+                <a:solidFill>
+                  <a:srgbClr val="2980B9"/>
+                </a:solidFill>
+                <a:latin typeface="Segoe UI"/>
+              </a:defRPr>
+            </a:pPr>
+            <a:r>
+              <a:t>BM25 = Best Matching 25</a:t>
+            </a:r>
+          </a:p>
+        </p:txBody>
+      </p:sp>
+      <p:sp>
+        <p:nvSpPr>
+          <p:cNvPr id="8" name="TextBox 7"/>
+          <p:cNvSpPr txBox="1"/>
+          <p:nvPr/>
+        </p:nvSpPr>
+        <p:spPr>
+          <a:xfrm>
             <a:off x="274320" y="6400800"/>
             <a:ext cx="6400800" cy="365760"/>
           </a:xfrm>
@@ -12903,7 +12939,7 @@
       </p:sp>
       <p:sp>
         <p:nvSpPr>
-          <p:cNvPr id="8" name="TextBox 7"/>
+          <p:cNvPr id="9" name="TextBox 8"/>
           <p:cNvSpPr txBox="1"/>
           <p:nvPr/>
         </p:nvSpPr>
@@ -15173,6 +15209,42 @@
         </p:nvSpPr>
         <p:spPr>
           <a:xfrm>
+            <a:off x="274320" y="6035040"/>
+            <a:ext cx="11612880" cy="320040"/>
+          </a:xfrm>
+          <a:prstGeom prst="rect">
+            <a:avLst/>
+          </a:prstGeom>
+          <a:noFill/>
+        </p:spPr>
+        <p:txBody>
+          <a:bodyPr wrap="square">
+            <a:spAutoFit/>
+          </a:bodyPr>
+          <a:lstStyle/>
+          <a:p>
+            <a:pPr algn="l">
+              <a:defRPr sz="900" b="0">
+                <a:solidFill>
+                  <a:srgbClr val="2980B9"/>
+                </a:solidFill>
+                <a:latin typeface="Segoe UI"/>
+              </a:defRPr>
+            </a:pPr>
+            <a:r>
+              <a:t>MVP = Minimum Viable Product</a:t>
+            </a:r>
+          </a:p>
+        </p:txBody>
+      </p:sp>
+      <p:sp>
+        <p:nvSpPr>
+          <p:cNvPr id="8" name="TextBox 7"/>
+          <p:cNvSpPr txBox="1"/>
+          <p:nvPr/>
+        </p:nvSpPr>
+        <p:spPr>
+          <a:xfrm>
             <a:off x="274320" y="6400800"/>
             <a:ext cx="6400800" cy="365760"/>
           </a:xfrm>
@@ -15203,7 +15275,7 @@
       </p:sp>
       <p:sp>
         <p:nvSpPr>
-          <p:cNvPr id="8" name="TextBox 7"/>
+          <p:cNvPr id="9" name="TextBox 8"/>
           <p:cNvSpPr txBox="1"/>
           <p:nvPr/>
         </p:nvSpPr>
@@ -15525,6 +15597,42 @@
         </p:nvSpPr>
         <p:spPr>
           <a:xfrm>
+            <a:off x="274320" y="6035040"/>
+            <a:ext cx="11612880" cy="320040"/>
+          </a:xfrm>
+          <a:prstGeom prst="rect">
+            <a:avLst/>
+          </a:prstGeom>
+          <a:noFill/>
+        </p:spPr>
+        <p:txBody>
+          <a:bodyPr wrap="square">
+            <a:spAutoFit/>
+          </a:bodyPr>
+          <a:lstStyle/>
+          <a:p>
+            <a:pPr algn="l">
+              <a:defRPr sz="900" b="0">
+                <a:solidFill>
+                  <a:srgbClr val="2980B9"/>
+                </a:solidFill>
+                <a:latin typeface="Segoe UI"/>
+              </a:defRPr>
+            </a:pPr>
+            <a:r>
+              <a:t>ACID = Atomicity Consistency Isolation Durability</a:t>
+            </a:r>
+          </a:p>
+        </p:txBody>
+      </p:sp>
+      <p:sp>
+        <p:nvSpPr>
+          <p:cNvPr id="8" name="TextBox 7"/>
+          <p:cNvSpPr txBox="1"/>
+          <p:nvPr/>
+        </p:nvSpPr>
+        <p:spPr>
+          <a:xfrm>
             <a:off x="274320" y="6400800"/>
             <a:ext cx="6400800" cy="365760"/>
           </a:xfrm>
@@ -15555,7 +15663,7 @@
       </p:sp>
       <p:sp>
         <p:nvSpPr>
-          <p:cNvPr id="8" name="TextBox 7"/>
+          <p:cNvPr id="9" name="TextBox 8"/>
           <p:cNvSpPr txBox="1"/>
           <p:nvPr/>
         </p:nvSpPr>
@@ -18100,6 +18208,42 @@
         </p:nvSpPr>
         <p:spPr>
           <a:xfrm>
+            <a:off x="274320" y="6035040"/>
+            <a:ext cx="11612880" cy="320040"/>
+          </a:xfrm>
+          <a:prstGeom prst="rect">
+            <a:avLst/>
+          </a:prstGeom>
+          <a:noFill/>
+        </p:spPr>
+        <p:txBody>
+          <a:bodyPr wrap="square">
+            <a:spAutoFit/>
+          </a:bodyPr>
+          <a:lstStyle/>
+          <a:p>
+            <a:pPr algn="l">
+              <a:defRPr sz="900" b="0">
+                <a:solidFill>
+                  <a:srgbClr val="2980B9"/>
+                </a:solidFill>
+                <a:latin typeface="Segoe UI"/>
+              </a:defRPr>
+            </a:pPr>
+            <a:r>
+              <a:t>AgentOps = Agent Operations  ·  MCP = Model Context Protocol</a:t>
+            </a:r>
+          </a:p>
+        </p:txBody>
+      </p:sp>
+      <p:sp>
+        <p:nvSpPr>
+          <p:cNvPr id="8" name="TextBox 7"/>
+          <p:cNvSpPr txBox="1"/>
+          <p:nvPr/>
+        </p:nvSpPr>
+        <p:spPr>
+          <a:xfrm>
             <a:off x="274320" y="6400800"/>
             <a:ext cx="6400800" cy="365760"/>
           </a:xfrm>
@@ -18130,7 +18274,7 @@
       </p:sp>
       <p:sp>
         <p:nvSpPr>
-          <p:cNvPr id="8" name="TextBox 7"/>
+          <p:cNvPr id="9" name="TextBox 8"/>
           <p:cNvSpPr txBox="1"/>
           <p:nvPr/>
         </p:nvSpPr>
@@ -19256,6 +19400,42 @@
         </p:nvSpPr>
         <p:spPr>
           <a:xfrm>
+            <a:off x="274320" y="6035040"/>
+            <a:ext cx="11612880" cy="320040"/>
+          </a:xfrm>
+          <a:prstGeom prst="rect">
+            <a:avLst/>
+          </a:prstGeom>
+          <a:noFill/>
+        </p:spPr>
+        <p:txBody>
+          <a:bodyPr wrap="square">
+            <a:spAutoFit/>
+          </a:bodyPr>
+          <a:lstStyle/>
+          <a:p>
+            <a:pPr algn="l">
+              <a:defRPr sz="900" b="0">
+                <a:solidFill>
+                  <a:srgbClr val="2980B9"/>
+                </a:solidFill>
+                <a:latin typeface="Segoe UI"/>
+              </a:defRPr>
+            </a:pPr>
+            <a:r>
+              <a:t>NER = Named Entity Recognition</a:t>
+            </a:r>
+          </a:p>
+        </p:txBody>
+      </p:sp>
+      <p:sp>
+        <p:nvSpPr>
+          <p:cNvPr id="11" name="TextBox 10"/>
+          <p:cNvSpPr txBox="1"/>
+          <p:nvPr/>
+        </p:nvSpPr>
+        <p:spPr>
+          <a:xfrm>
             <a:off x="274320" y="6400800"/>
             <a:ext cx="6400800" cy="365760"/>
           </a:xfrm>
@@ -19286,7 +19466,7 @@
       </p:sp>
       <p:sp>
         <p:nvSpPr>
-          <p:cNvPr id="11" name="TextBox 10"/>
+          <p:cNvPr id="12" name="TextBox 11"/>
           <p:cNvSpPr txBox="1"/>
           <p:nvPr/>
         </p:nvSpPr>
@@ -19608,6 +19788,42 @@
         </p:nvSpPr>
         <p:spPr>
           <a:xfrm>
+            <a:off x="274320" y="6035040"/>
+            <a:ext cx="11612880" cy="320040"/>
+          </a:xfrm>
+          <a:prstGeom prst="rect">
+            <a:avLst/>
+          </a:prstGeom>
+          <a:noFill/>
+        </p:spPr>
+        <p:txBody>
+          <a:bodyPr wrap="square">
+            <a:spAutoFit/>
+          </a:bodyPr>
+          <a:lstStyle/>
+          <a:p>
+            <a:pPr algn="l">
+              <a:defRPr sz="900" b="0">
+                <a:solidFill>
+                  <a:srgbClr val="2980B9"/>
+                </a:solidFill>
+                <a:latin typeface="Segoe UI"/>
+              </a:defRPr>
+            </a:pPr>
+            <a:r>
+              <a:t>LLM = Large Language Model</a:t>
+            </a:r>
+          </a:p>
+        </p:txBody>
+      </p:sp>
+      <p:sp>
+        <p:nvSpPr>
+          <p:cNvPr id="8" name="TextBox 7"/>
+          <p:cNvSpPr txBox="1"/>
+          <p:nvPr/>
+        </p:nvSpPr>
+        <p:spPr>
+          <a:xfrm>
             <a:off x="274320" y="6400800"/>
             <a:ext cx="6400800" cy="365760"/>
           </a:xfrm>
@@ -19638,7 +19854,7 @@
       </p:sp>
       <p:sp>
         <p:nvSpPr>
-          <p:cNvPr id="8" name="TextBox 7"/>
+          <p:cNvPr id="9" name="TextBox 8"/>
           <p:cNvSpPr txBox="1"/>
           <p:nvPr/>
         </p:nvSpPr>
@@ -22292,6 +22508,42 @@
         </p:nvSpPr>
         <p:spPr>
           <a:xfrm>
+            <a:off x="274320" y="6035040"/>
+            <a:ext cx="11612880" cy="320040"/>
+          </a:xfrm>
+          <a:prstGeom prst="rect">
+            <a:avLst/>
+          </a:prstGeom>
+          <a:noFill/>
+        </p:spPr>
+        <p:txBody>
+          <a:bodyPr wrap="square">
+            <a:spAutoFit/>
+          </a:bodyPr>
+          <a:lstStyle/>
+          <a:p>
+            <a:pPr algn="l">
+              <a:defRPr sz="900" b="0">
+                <a:solidFill>
+                  <a:srgbClr val="2980B9"/>
+                </a:solidFill>
+                <a:latin typeface="Segoe UI"/>
+              </a:defRPr>
+            </a:pPr>
+            <a:r>
+              <a:t>ANN = Approximate Nearest Neighbor</a:t>
+            </a:r>
+          </a:p>
+        </p:txBody>
+      </p:sp>
+      <p:sp>
+        <p:nvSpPr>
+          <p:cNvPr id="8" name="TextBox 7"/>
+          <p:cNvSpPr txBox="1"/>
+          <p:nvPr/>
+        </p:nvSpPr>
+        <p:spPr>
+          <a:xfrm>
             <a:off x="274320" y="6400800"/>
             <a:ext cx="6400800" cy="365760"/>
           </a:xfrm>
@@ -22322,7 +22574,7 @@
       </p:sp>
       <p:sp>
         <p:nvSpPr>
-          <p:cNvPr id="8" name="TextBox 7"/>
+          <p:cNvPr id="9" name="TextBox 8"/>
           <p:cNvSpPr txBox="1"/>
           <p:nvPr/>
         </p:nvSpPr>
@@ -26698,6 +26950,42 @@
         </p:nvSpPr>
         <p:spPr>
           <a:xfrm>
+            <a:off x="274320" y="6035040"/>
+            <a:ext cx="11612880" cy="320040"/>
+          </a:xfrm>
+          <a:prstGeom prst="rect">
+            <a:avLst/>
+          </a:prstGeom>
+          <a:noFill/>
+        </p:spPr>
+        <p:txBody>
+          <a:bodyPr wrap="square">
+            <a:spAutoFit/>
+          </a:bodyPr>
+          <a:lstStyle/>
+          <a:p>
+            <a:pPr algn="l">
+              <a:defRPr sz="900" b="0">
+                <a:solidFill>
+                  <a:srgbClr val="2980B9"/>
+                </a:solidFill>
+                <a:latin typeface="Segoe UI"/>
+              </a:defRPr>
+            </a:pPr>
+            <a:r>
+              <a:t>RAG = Retrieval-Augmented Generation</a:t>
+            </a:r>
+          </a:p>
+        </p:txBody>
+      </p:sp>
+      <p:sp>
+        <p:nvSpPr>
+          <p:cNvPr id="11" name="TextBox 10"/>
+          <p:cNvSpPr txBox="1"/>
+          <p:nvPr/>
+        </p:nvSpPr>
+        <p:spPr>
+          <a:xfrm>
             <a:off x="274320" y="6400800"/>
             <a:ext cx="6400800" cy="365760"/>
           </a:xfrm>
@@ -26728,7 +27016,7 @@
       </p:sp>
       <p:sp>
         <p:nvSpPr>
-          <p:cNvPr id="11" name="TextBox 10"/>
+          <p:cNvPr id="12" name="TextBox 11"/>
           <p:cNvSpPr txBox="1"/>
           <p:nvPr/>
         </p:nvSpPr>
